--- a/9주차/한국어/게임엔진기초_9주차_오프라인_실습슬라이드.pptx
+++ b/9주차/한국어/게임엔진기초_9주차_오프라인_실습슬라이드.pptx
@@ -133,12 +133,12 @@
   <p:extLst>
     <p:ext uri="{521415D9-36F7-43E2-AB2F-B90AF26B5E84}">
       <p14:sectionLst xmlns:p14="http://schemas.microsoft.com/office/powerpoint/2010/main">
-        <p14:section name="시작" id="{e34a21ac-7a1a-0a7b-89db-caa5224f5d4d}">
+        <p14:section name="시작" id="{59a84434-b329-518b-e109-55df85ac3612}">
           <p14:sldIdLst>
             <p14:sldId id="256"/>
           </p14:sldIdLst>
         </p14:section>
-        <p14:section name="실습 1" id="{6c1f8af9-aa5e-f7af-4284-63d44c26cd0a}">
+        <p14:section name="실습 1" id="{df171d94-50a8-5d8b-1b24-917612e3d464}">
           <p14:sldIdLst>
             <p14:sldId id="257"/>
             <p14:sldId id="258"/>
@@ -146,21 +146,21 @@
             <p14:sldId id="260"/>
           </p14:sldIdLst>
         </p14:section>
-        <p14:section name="실습 2" id="{a27e13f5-96c8-5aa0-d28b-43b1a0d0a800}">
+        <p14:section name="실습 2" id="{f838d582-e826-b329-8382-a2e41b61d505}">
           <p14:sldIdLst>
             <p14:sldId id="261"/>
             <p14:sldId id="262"/>
             <p14:sldId id="263"/>
           </p14:sldIdLst>
         </p14:section>
-        <p14:section name="실습 3" id="{ad72699a-e767-f3b4-c674-748ddfbbad49}">
+        <p14:section name="실습 3" id="{f0e5309c-60d8-a7ab-d720-3ae4df59723d}">
           <p14:sldIdLst>
             <p14:sldId id="264"/>
             <p14:sldId id="265"/>
             <p14:sldId id="266"/>
           </p14:sldIdLst>
         </p14:section>
-        <p14:section name="실습 4" id="{360e9159-bc9a-30a1-e917-a2e2d6d630fe}">
+        <p14:section name="실습 4" id="{eb801cd5-4fa0-8969-5a22-d84295913113}">
           <p14:sldIdLst>
             <p14:sldId id="267"/>
             <p14:sldId id="268"/>
@@ -169,13 +169,13 @@
             <p14:sldId id="271"/>
           </p14:sldIdLst>
         </p14:section>
-        <p14:section name="실습 5" id="{8a9ce006-96ba-7a78-2c8f-bec53218b135}">
+        <p14:section name="실습 5" id="{b22bb13e-ad2e-2774-cf5a-fc3f381cf06f}">
           <p14:sldIdLst>
             <p14:sldId id="272"/>
             <p14:sldId id="273"/>
           </p14:sldIdLst>
         </p14:section>
-        <p14:section name="실습 6" id="{3c32b818-4af8-ca65-9d50-aff34384af96}">
+        <p14:section name="실습 6" id="{2b9a0535-dcde-4640-e1a8-dbb107b16b79}">
           <p14:sldIdLst>
             <p14:sldId id="274"/>
             <p14:sldId id="275"/>
@@ -186,7 +186,7 @@
             <p14:sldId id="280"/>
           </p14:sldIdLst>
         </p14:section>
-        <p14:section name="마무리" id="{85dbc78a-a975-4952-2139-8aa1e57f9082}">
+        <p14:section name="마무리" id="{de53dbed-b35a-39a3-2444-c7750cff1511}">
           <p14:sldIdLst>
             <p14:sldId id="281"/>
             <p14:sldId id="282"/>
@@ -16827,7 +16827,7 @@
                 <a:ea typeface="Noto Sans KR" pitchFamily="34" charset="-122"/>
                 <a:cs typeface="Noto Sans KR" pitchFamily="34" charset="-120"/>
               </a:rPr>
-              <a:t>중간과 다른 새 게임. 혼자 5주 안에 끝낼 수 있는 크기로</a:t>
+              <a:t>중간과 다른 새 게임. 혼자 6주 안에 끝낼 수 있는 크기로</a:t>
             </a:r>
             <a:endParaRPr lang="en-US" sz="1700" dirty="0"/>
           </a:p>
@@ -30899,7 +30899,7 @@
                   <a:srgbClr val="1E242B"/>
                 </a:solidFill>
               </a:rPr>
-              <a:t>크기 점검 — 5주 안에 혼자 끝낼 수 있나</a:t>
+              <a:t>크기 점검 — 6주 안에 혼자 끝낼 수 있나</a:t>
             </a:r>
             <a:endParaRPr lang="en-US" sz="2800" dirty="0"/>
           </a:p>
